--- a/Traffic_Signal_Control_Presentationgroup.pptx
+++ b/Traffic_Signal_Control_Presentationgroup.pptx
@@ -16243,7 +16243,7 @@
                 <a:cs typeface="Calibri"/>
                 <a:sym typeface="Calibri"/>
               </a:rPr>
-              <a:t>Low:      45,112 vehicles  |  1.04 v/sec  |  Wed May 1, 2019</a:t>
+              <a:t>Low:      45,112 vehicles  |  1.04 v/sec  |  Mon May 6, 2019</a:t>
             </a:r>
             <a:endParaRPr/>
           </a:p>
@@ -16310,7 +16310,7 @@
                 <a:cs typeface="Calibri"/>
                 <a:sym typeface="Calibri"/>
               </a:rPr>
-              <a:t>Medium:  51,298 vehicles  |  1.19 v/sec  |  Mon May 6, 2019</a:t>
+              <a:t>Medium:  51,298 vehicles  |  1.19 v/sec  |  Wed May 1, 2019</a:t>
             </a:r>
             <a:endParaRPr/>
           </a:p>

--- a/Traffic_Signal_Control_Presentationgroup.pptx
+++ b/Traffic_Signal_Control_Presentationgroup.pptx
@@ -277,7 +277,7 @@
       </p15:sldGuideLst>
     </p:ext>
     <p:ext uri="GoogleSlidesCustomDataVersion2">
-      <go:slidesCustomData xmlns:go="http://customooxmlschemas.google.com/" xmlns:ahyp="http://schemas.microsoft.com/office/drawing/2018/hyperlinkcolor" xmlns:p15="http://schemas.microsoft.com/office/powerpoint/2012/main" xmlns:p14="http://schemas.microsoft.com/office/powerpoint/2010/main" xmlns:com="http://schemas.openxmlformats.org/drawingml/2006/compatibility" xmlns:pvml="urn:schemas-microsoft-com:office:powerpoint" xmlns:v="urn:schemas-microsoft-com:vml" xmlns:o="urn:schemas-microsoft-com:office:office" xmlns:dgm="http://schemas.openxmlformats.org/drawingml/2006/diagram" xmlns:c="http://schemas.openxmlformats.org/drawingml/2006/chart" xmlns:mv="urn:schemas-microsoft-com:mac:vml" xmlns:mc="http://schemas.openxmlformats.org/markup-compatibility/2006" xmlns="" r:id="rId26" roundtripDataSignature="AMtx7mjIcXwF0d8Ts9qnZnaM9XNRlbFIow=="/>
+      <go:slidesCustomData xmlns="" xmlns:mc="http://schemas.openxmlformats.org/markup-compatibility/2006" xmlns:mv="urn:schemas-microsoft-com:mac:vml" xmlns:c="http://schemas.openxmlformats.org/drawingml/2006/chart" xmlns:dgm="http://schemas.openxmlformats.org/drawingml/2006/diagram" xmlns:o="urn:schemas-microsoft-com:office:office" xmlns:v="urn:schemas-microsoft-com:vml" xmlns:pvml="urn:schemas-microsoft-com:office:powerpoint" xmlns:com="http://schemas.openxmlformats.org/drawingml/2006/compatibility" xmlns:p14="http://schemas.microsoft.com/office/powerpoint/2010/main" xmlns:p15="http://schemas.microsoft.com/office/powerpoint/2012/main" xmlns:ahyp="http://schemas.microsoft.com/office/drawing/2018/hyperlinkcolor" xmlns:go="http://customooxmlschemas.google.com/" r:id="rId26" roundtripDataSignature="AMtx7mjIcXwF0d8Ts9qnZnaM9XNRlbFIow=="/>
     </p:ext>
   </p:extLst>
 </p:presentation>
@@ -14436,7 +14436,7 @@
         </p:nvSpPr>
         <p:spPr>
           <a:xfrm>
-            <a:off x="548640" y="137160"/>
+            <a:off x="365760" y="175260"/>
             <a:ext cx="10972800" cy="523200"/>
           </a:xfrm>
           <a:prstGeom prst="rect">
@@ -14463,7 +14463,7 @@
               <a:buNone/>
             </a:pPr>
             <a:r>
-              <a:rPr lang="en-US" sz="2800" b="1" i="0" u="none" strike="noStrike" cap="none">
+              <a:rPr lang="en-US" sz="2800" b="1" i="0" u="none" strike="noStrike" cap="none" dirty="0">
                 <a:solidFill>
                   <a:srgbClr val="FFFFFF"/>
                 </a:solidFill>
@@ -14474,7 +14474,7 @@
               </a:rPr>
               <a:t>PPO (Proximal Policy Optimization)</a:t>
             </a:r>
-            <a:endParaRPr/>
+            <a:endParaRPr dirty="0"/>
           </a:p>
         </p:txBody>
       </p:sp>
@@ -14618,7 +14618,7 @@
           <a:p>
             <a:pPr algn="ctr"/>
             <a:r>
-              <a:rPr sz="1500" b="0">
+              <a:rPr sz="1500" b="0" dirty="0">
                 <a:solidFill>
                   <a:srgbClr val="1B3A5C"/>
                 </a:solidFill>
@@ -14636,7 +14636,7 @@
         </p:nvSpPr>
         <p:spPr>
           <a:xfrm>
-            <a:off x="548640" y="2011680"/>
+            <a:off x="548640" y="2043211"/>
             <a:ext cx="5303520" cy="3291840"/>
           </a:xfrm>
           <a:prstGeom prst="roundRect">
@@ -15012,7 +15012,7 @@
           <a:p>
             <a:pPr algn="ctr"/>
             <a:r>
-              <a:rPr sz="1400" b="0">
+              <a:rPr sz="1400" b="0" dirty="0">
                 <a:solidFill>
                   <a:srgbClr val="FFFFFF"/>
                 </a:solidFill>
@@ -15055,7 +15055,7 @@
         </p:nvSpPr>
         <p:spPr>
           <a:xfrm>
-            <a:off x="0" y="0"/>
+            <a:off x="0" y="-31531"/>
             <a:ext cx="12188952" cy="822960"/>
           </a:xfrm>
           <a:prstGeom prst="rect">
@@ -15114,7 +15114,7 @@
           <a:lstStyle/>
           <a:p>
             <a:r>
-              <a:rPr sz="2800" b="1">
+              <a:rPr sz="2800" b="1" dirty="0">
                 <a:solidFill>
                   <a:srgbClr val="FFFFFF"/>
                 </a:solidFill>
@@ -15176,7 +15176,7 @@
         </p:nvSpPr>
         <p:spPr>
           <a:xfrm>
-            <a:off x="548640" y="1097280"/>
+            <a:off x="548640" y="1118300"/>
             <a:ext cx="11064240" cy="548640"/>
           </a:xfrm>
           <a:prstGeom prst="roundRect">
@@ -15358,7 +15358,7 @@
           <a:p>
             <a:pPr algn="ctr"/>
             <a:r>
-              <a:rPr sz="1600" b="1">
+              <a:rPr sz="1600" b="1" dirty="0">
                 <a:solidFill>
                   <a:srgbClr val="1B3A5C"/>
                 </a:solidFill>
@@ -15368,7 +15368,7 @@
           </a:p>
           <a:p>
             <a:r>
-              <a:rPr sz="1100" b="0">
+              <a:rPr sz="1100" b="0" dirty="0">
                 <a:solidFill>
                   <a:srgbClr val="666666"/>
                 </a:solidFill>
@@ -15377,7 +15377,7 @@
             </a:r>
           </a:p>
           <a:p>
-            <a:endParaRPr sz="1100" b="0">
+            <a:endParaRPr sz="1100" b="0" dirty="0">
               <a:solidFill>
                 <a:srgbClr val="666666"/>
               </a:solidFill>
@@ -15385,7 +15385,7 @@
           </a:p>
           <a:p>
             <a:r>
-              <a:rPr sz="1400" b="1">
+              <a:rPr sz="1400" b="1" dirty="0">
                 <a:solidFill>
                   <a:srgbClr val="333333"/>
                 </a:solidFill>
@@ -15395,7 +15395,7 @@
           </a:p>
           <a:p>
             <a:r>
-              <a:rPr sz="1300" b="0">
+              <a:rPr sz="1300" b="0" dirty="0">
                 <a:solidFill>
                   <a:srgbClr val="666666"/>
                 </a:solidFill>
@@ -15405,7 +15405,7 @@
           </a:p>
           <a:p>
             <a:r>
-              <a:rPr sz="1300" b="0">
+              <a:rPr sz="1300" b="0" dirty="0">
                 <a:solidFill>
                   <a:srgbClr val="666666"/>
                 </a:solidFill>
@@ -15456,7 +15456,7 @@
           <a:p>
             <a:pPr algn="ctr"/>
             <a:r>
-              <a:rPr sz="1600" b="1">
+              <a:rPr sz="1600" b="1" dirty="0">
                 <a:solidFill>
                   <a:srgbClr val="1B3A5C"/>
                 </a:solidFill>
@@ -15466,7 +15466,7 @@
           </a:p>
           <a:p>
             <a:r>
-              <a:rPr sz="1100" b="0">
+              <a:rPr sz="1100" b="0" dirty="0">
                 <a:solidFill>
                   <a:srgbClr val="666666"/>
                 </a:solidFill>
@@ -15475,7 +15475,7 @@
             </a:r>
           </a:p>
           <a:p>
-            <a:endParaRPr sz="1100" b="0">
+            <a:endParaRPr sz="1100" b="0" dirty="0">
               <a:solidFill>
                 <a:srgbClr val="666666"/>
               </a:solidFill>
@@ -15483,7 +15483,7 @@
           </a:p>
           <a:p>
             <a:r>
-              <a:rPr sz="1400" b="1">
+              <a:rPr sz="1400" b="1" dirty="0">
                 <a:solidFill>
                   <a:srgbClr val="CC3333"/>
                 </a:solidFill>
@@ -15493,7 +15493,7 @@
           </a:p>
           <a:p>
             <a:r>
-              <a:rPr sz="1300" b="0">
+              <a:rPr sz="1300" b="0" dirty="0">
                 <a:solidFill>
                   <a:srgbClr val="666666"/>
                 </a:solidFill>
@@ -15503,7 +15503,7 @@
           </a:p>
           <a:p>
             <a:r>
-              <a:rPr sz="1300" b="0">
+              <a:rPr sz="1300" b="0" dirty="0">
                 <a:solidFill>
                   <a:srgbClr val="666666"/>
                 </a:solidFill>
@@ -15587,7 +15587,7 @@
           <a:p>
             <a:pPr algn="ctr"/>
             <a:r>
-              <a:rPr sz="1300" b="0">
+              <a:rPr sz="1300" b="0" dirty="0">
                 <a:solidFill>
                   <a:srgbClr val="333333"/>
                 </a:solidFill>
@@ -15597,7 +15597,7 @@
           </a:p>
           <a:p>
             <a:r>
-              <a:rPr sz="1300" b="0">
+              <a:rPr sz="1300" b="0" dirty="0">
                 <a:solidFill>
                   <a:srgbClr val="333333"/>
                 </a:solidFill>
